--- a/dist/초3/과학/물질과지구/초3_과학_물질과지구_01_물체와물질.pptx
+++ b/dist/초3/과학/물질과지구/초3_과학_물질과지구_01_물체와물질.pptx
@@ -122,20 +122,20 @@
   <p:extLst>
     <p:ext uri="{521415D9-36F7-43E2-AB2F-B90AF26B5E84}">
       <p14:sectionLst xmlns:p14="http://schemas.microsoft.com/office/powerpoint/2010/main">
-        <p14:section name="도입" id="{d3e54a4b-15e0-7d28-0a1f-0b0d06f2e1d0}">
+        <p14:section name="도입" id="{7c77895c-650c-3d93-4071-15a921c0f2b7}">
           <p14:sldIdLst>
             <p14:sldId id="256"/>
             <p14:sldId id="257"/>
           </p14:sldIdLst>
         </p14:section>
-        <p14:section name="개념" id="{c988c2bd-8a5a-b1eb-e5f1-7cadb5d932b7}">
+        <p14:section name="개념" id="{bb689ea3-2c0c-a39e-986f-f7d47349ee1a}">
           <p14:sldIdLst>
             <p14:sldId id="258"/>
             <p14:sldId id="264"/>
             <p14:sldId id="265"/>
           </p14:sldIdLst>
         </p14:section>
-        <p14:section name="연습" id="{25a460b8-bb44-2747-f84f-aa4459bc2187}">
+        <p14:section name="연습" id="{88773409-ce8c-e056-3c6e-c69d5a24bdee}">
           <p14:sldIdLst>
             <p14:sldId id="259"/>
             <p14:sldId id="260"/>
@@ -145,25 +145,25 @@
             <p14:sldId id="266"/>
           </p14:sldIdLst>
         </p14:section>
-        <p14:section name="개념" id="{929703cb-c084-328b-ad99-0f6fa850f198}">
+        <p14:section name="개념" id="{312888c4-d12f-4fd6-4e6e-a4b7043257b2}">
           <p14:sldIdLst/>
         </p14:section>
-        <p14:section name="연습" id="{dcb7d6e1-1be6-0a7d-9c79-924c748c85f8}">
+        <p14:section name="연습" id="{13030ab6-7e07-7099-3a07-777721d3ae78}">
           <p14:sldIdLst/>
         </p14:section>
-        <p14:section name="확인" id="{f4ec7e9b-f158-0911-6934-4ea4a615970e}">
+        <p14:section name="확인" id="{3bdcefbd-e9ba-c56a-3363-08a359b19be4}">
           <p14:sldIdLst>
             <p14:sldId id="267"/>
             <p14:sldId id="268"/>
             <p14:sldId id="269"/>
           </p14:sldIdLst>
         </p14:section>
-        <p14:section name="정리" id="{67e8a6b8-ab0c-c51f-a3c6-df81d1bc06c8}">
+        <p14:section name="정리" id="{0f782967-717c-5dee-8705-01b3b6b4e1ea}">
           <p14:sldIdLst>
             <p14:sldId id="270"/>
           </p14:sldIdLst>
         </p14:section>
-        <p14:section name="보충" id="{0f0e7bb2-4fcf-0c64-7af5-736e5b57121c}">
+        <p14:section name="보충" id="{4aae61b0-8032-4601-4da7-235a496caa06}">
           <p14:sldIdLst>
             <p14:sldId id="271"/>
           </p14:sldIdLst>
